--- a/docs/week-10/cen429-week-10-sunum.en.pptx
+++ b/docs/week-10/cen429-week-10-sunum.en.pptx
@@ -42632,40 +42632,30 @@
           </a:p>
         </p:txBody>
       </p:sp>
-      <p:sp>
-        <p:nvSpPr>
-          <p:cNvPr id="7" name="TextBox 6"/>
-          <p:cNvSpPr txBox="1"/>
-          <p:nvPr/>
-        </p:nvSpPr>
-        <p:spPr>
-          <a:xfrm>
-            <a:off x="640080" y="1325880"/>
-            <a:ext cx="10911535" cy="4501387"/>
-          </a:xfrm>
-          <a:prstGeom prst="rect">
-            <a:avLst/>
-          </a:prstGeom>
-          <a:noFill/>
-        </p:spPr>
-        <p:txBody>
-          <a:bodyPr wrap="square" lIns="45720" rIns="45720">
-            <a:spAutoFit/>
-          </a:bodyPr>
-          <a:lstStyle/>
-          <a:p>
-            <a:pPr algn="l"/>
-            <a:r>
-              <a:rPr sz="1400" b="0">
-                <a:solidFill>
-                  <a:srgbClr val="1F2D3A"/>
-                </a:solidFill>
-              </a:rPr>
-              <a:t>&lt;svg viewBox="0 0 960 260" style="width:96%;height:auto;display:block;margin:2px auto" font-family="sans-serif"&gt; &lt;rect x="30" y="70" width="240" height="90" rx="10" fill="#006d77"/&gt;&lt;text x="150" y="102" text-anchor="middle" font-size="18" fill="#fff" font-weight="bold"&gt;KÖK CA&lt;/text&gt;&lt;text x="150" y="128" text-anchor="middle" font-size="13" fill="#cdeff1"&gt;kendini imzalar&lt;/text&gt;&lt;text x="150" y="148" text-anchor="middle" font-size="13" fill="#cdeff1"&gt;güven demiri&lt;/text&gt; &lt;rect x="360" y="70" width="240" height="90" rx="10" fill="#0a9396"/&gt;&lt;text x="480" y="102" text-anchor="middle" font-size="18" fill="#fff" font-weight="bold"&gt;ARA CA&lt;/text&gt;&lt;text x="480" y="128" text-anchor="middle" font-size="13" fill="#e6fbfc"&gt;CA:TRUE&lt;/text&gt;&lt;text x="480" y="148" text-anchor="middle" font-size="13" fill="#e6fbfc"&gt;kök tarafından imzalı&lt;/text&gt; &lt;rect x="690" y="70" width="240" height="90" rx="10" fill="#4cb5ac"/&gt;&lt;text x="810" y="102" text-anchor="middle" font-size="18" fill="#fff" font-weight="bold"&gt;SUNUCU&lt;/text&gt;&lt;text x="810" y="128" text-anchor="middle" font-size="13" fill="#effaf9"&gt;SAN=ornek.com&lt;/text&gt;&lt;text x="810" y="148" text-anchor="middle" font-size="13" fill="#effaf9"&gt;ara tarafından imzalı&lt;/text&gt; &lt;line x1="270" y1="115" x2="360" y2="115" stroke="#333" stroke-width="3" marker-end="url(#s10)"/&gt;&lt;text x="315" y="106" text-anchor="middle" font-size="13" fill="#333"&gt;imzalar&lt;/text&gt; &lt;line x1="600" y1="115" x2="690" y2="115" stroke="#333" stroke-width="3" marker-end="url(#s10)"/&gt;&lt;text x="645" y="106" text-anchor="middle" font-size="13" fill="#333"&gt;imzalar&lt;/text&gt; &lt;text x="480" y="30" text-anchor="middle" font-size="16" fill="#005f66" font-weight="bold"&gt;Doğrulamanın 4 sorusu&lt;/text&gt; &lt;text x="480" y="210" text-anchor="middle" font-size="14.5" fill="#333"&gt;1) zincir kök'e geçerli mi · 2) süre içinde mi · 3) amaç/kısıt (CA:TRUE, EKU) · 4) iptal (CRL/OCSP)&lt;/text&gt; &lt;text x="480" y="236" text-anchor="middle" font-size="14" fill="#c0392b"&gt;Ara eksikse zincir kurulamaz · ad SAN'a bakılır (CN değil).&lt;/text&gt; &lt;defs&gt;&lt;marker id="s10" markerWidth="9" markerHeight="9" refX="7" refY="3" orient="auto"&gt;&lt;path d="M0,0 L7,3 L0,6 Z" fill="#333"/&gt;&lt;/marker&gt;&lt;/defs&gt; &lt;/svg&gt;</a:t>
-            </a:r>
-          </a:p>
-        </p:txBody>
-      </p:sp>
+      <p:pic>
+        <p:nvPicPr>
+          <p:cNvPr id="7" name="Picture 6" descr="h10-03-pki.png"/>
+          <p:cNvPicPr>
+            <a:picLocks noChangeAspect="1"/>
+          </p:cNvPicPr>
+          <p:nvPr/>
+        </p:nvPicPr>
+        <p:blipFill>
+          <a:blip r:embed="rId3"/>
+          <a:stretch>
+            <a:fillRect/>
+          </a:stretch>
+        </p:blipFill>
+        <p:spPr>
+          <a:xfrm>
+            <a:off x="1833529" y="1325880"/>
+            <a:ext cx="8524636" cy="3518033"/>
+          </a:xfrm>
+          <a:prstGeom prst="rect">
+            <a:avLst/>
+          </a:prstGeom>
+        </p:spPr>
+      </p:pic>
     </p:spTree>
   </p:cSld>
   <p:clrMapOvr>
